--- a/public/fun/pack/pptx/weddingpro/결혼식프리미엄_14_오시는길중심_네이비샴페인.pptx
+++ b/public/fun/pack/pptx/weddingpro/결혼식프리미엄_14_오시는길중심_네이비샴페인.pptx
@@ -113,12 +113,12 @@
   <p:extLst>
     <p:ext uri="{521415D9-36F7-43E2-AB2F-B90AF26B5E84}">
       <p14:sectionLst xmlns:p14="http://schemas.microsoft.com/office/powerpoint/2010/main">
-        <p14:section name="시작" id="{DE5A243D-B1F5-4350-9492-C6D57158FBFC}">
+        <p14:section name="시작" id="{6552B2CE-7420-451F-8DC5-289198783426}">
           <p14:sldIdLst>
             <p14:sldId id="256"/>
           </p14:sldIdLst>
         </p14:section>
-        <p14:section name="본문" id="{15CB7CF9-804F-462D-8A3A-F9EF263B4DFA}">
+        <p14:section name="본문" id="{17BEC9C1-1721-426E-8049-8B4770BBBC75}">
           <p14:sldIdLst>
             <p14:sldId id="257"/>
             <p14:sldId id="258"/>
@@ -127,7 +127,7 @@
             <p14:sldId id="261"/>
           </p14:sldIdLst>
         </p14:section>
-        <p14:section name="마무리" id="{9BF69DC0-2F6A-4CD7-8CAB-780939CA8777}">
+        <p14:section name="마무리" id="{6A53D3D8-D39E-421F-BF09-0C2D38030AA7}">
           <p14:sldIdLst>
             <p14:sldId id="262"/>
           </p14:sldIdLst>
@@ -1949,7 +1949,7 @@
             </a:lvl1pPr>
           </a:lstStyle>
           <a:p>
-            <a:fld id="{1E8E96C3-88B3-4716-8248-A7E148C2A1F1}" type="slidenum">
+            <a:fld id="{A6912B12-CA38-4A62-81D4-7E51DF94A35A}" type="slidenum">
               <a:rPr lang="en-US"/>
               <a:t>‹#›</a:t>
             </a:fld>
@@ -3061,7 +3061,7 @@
             </a:lvl1pPr>
           </a:lstStyle>
           <a:p>
-            <a:fld id="{B807AA69-57BF-4AA5-B634-D6433B0AE759}" type="slidenum">
+            <a:fld id="{4E643856-CCD5-4F03-8994-9C1D391C515F}" type="slidenum">
               <a:rPr lang="en-US"/>
               <a:t>‹#›</a:t>
             </a:fld>
@@ -3745,7 +3745,7 @@
             </a:lvl1pPr>
           </a:lstStyle>
           <a:p>
-            <a:fld id="{2C61B6A4-CBFA-4667-91A2-72082F0662DC}" type="slidenum">
+            <a:fld id="{7A8047EE-DD0C-4A79-AC0A-DF4CE79D72AA}" type="slidenum">
               <a:rPr lang="en-US"/>
               <a:t>‹#›</a:t>
             </a:fld>
@@ -4596,7 +4596,7 @@
           <a:p>
             <a:r>
               <a:rPr lang="ko-KR"/>
-              <a:t>0000. 00. 00 · 예식장 이름</a:t>
+              <a:t>날짜 입력 · 예식장 이름</a:t>
             </a:r>
           </a:p>
         </p:txBody>
@@ -4829,7 +4829,7 @@
           <a:bodyPr/>
           <a:lstStyle/>
           <a:p>
-            <a:fld id="{96E25C9D-17EB-44CC-850A-6DF4A20370D9}" type="slidenum">
+            <a:fld id="{1A2DC7A6-9F0A-40D4-94A7-DBDEA46AFD9B}" type="slidenum">
               <a:rPr lang="en-US"/>
               <a:t>‹#›</a:t>
             </a:fld>
@@ -5348,7 +5348,7 @@
           <a:bodyPr/>
           <a:lstStyle/>
           <a:p>
-            <a:fld id="{B16DFE7D-10C1-49E6-BCF6-34208CF4254C}" type="slidenum">
+            <a:fld id="{0EB3DBD1-4BAE-4423-A9FA-19E24AE790FC}" type="slidenum">
               <a:rPr lang="en-US"/>
               <a:t>‹#›</a:t>
             </a:fld>
@@ -5786,7 +5786,7 @@
           <a:bodyPr/>
           <a:lstStyle/>
           <a:p>
-            <a:fld id="{AC43F2E1-692C-4DDD-B227-9395257D9C95}" type="slidenum">
+            <a:fld id="{A092DE4A-69AB-47C1-AF58-11B68A21D627}" type="slidenum">
               <a:rPr lang="en-US"/>
               <a:t>‹#›</a:t>
             </a:fld>
@@ -7158,7 +7158,7 @@
           <a:bodyPr/>
           <a:lstStyle/>
           <a:p>
-            <a:fld id="{CC89D76F-9999-403D-8B8C-AE6EA3E764E1}" type="slidenum">
+            <a:fld id="{F4906458-759E-4544-87E2-737C0D21D298}" type="slidenum">
               <a:rPr lang="en-US"/>
               <a:t>‹#›</a:t>
             </a:fld>
@@ -7246,7 +7246,7 @@
           <a:bodyPr/>
           <a:lstStyle/>
           <a:p>
-            <a:fld id="{F47A9F2D-59BE-484B-B5CF-19B243D2BA7E}" type="slidenum">
+            <a:fld id="{6117287C-82FA-4E6B-9233-8513C66A45B1}" type="slidenum">
               <a:rPr lang="en-US"/>
               <a:t>‹#›</a:t>
             </a:fld>
